--- a/УП01 презентация.pptx
+++ b/УП01 презентация.pptx
@@ -3335,6 +3335,36 @@
           <a:chExt cx="0" cy="0"/>
         </a:xfrm>
       </p:grpSpPr>
+      <p:pic>
+        <p:nvPicPr>
+          <p:cNvPr id="5" name="Рисунок 4"/>
+          <p:cNvPicPr>
+            <a:picLocks noChangeAspect="1"/>
+          </p:cNvPicPr>
+          <p:nvPr/>
+        </p:nvPicPr>
+        <p:blipFill>
+          <a:blip r:embed="rId2">
+            <a:extLst>
+              <a:ext uri="{28A0092B-C50C-407E-A947-70E740481C1C}">
+                <a14:useLocalDpi xmlns:a14="http://schemas.microsoft.com/office/drawing/2010/main" val="0"/>
+              </a:ext>
+            </a:extLst>
+          </a:blip>
+          <a:stretch>
+            <a:fillRect/>
+          </a:stretch>
+        </p:blipFill>
+        <p:spPr>
+          <a:xfrm>
+            <a:off x="0" y="0"/>
+            <a:ext cx="12192000" cy="6858000"/>
+          </a:xfrm>
+          <a:prstGeom prst="rect">
+            <a:avLst/>
+          </a:prstGeom>
+        </p:spPr>
+      </p:pic>
       <p:sp>
         <p:nvSpPr>
           <p:cNvPr id="2" name="Заголовок 1">
@@ -3423,8 +3453,8 @@
         </p:nvSpPr>
         <p:spPr>
           <a:xfrm>
-            <a:off x="8078165" y="5231955"/>
-            <a:ext cx="3325398" cy="646331"/>
+            <a:off x="7799242" y="5231955"/>
+            <a:ext cx="3604321" cy="923330"/>
           </a:xfrm>
           <a:prstGeom prst="rect">
             <a:avLst/>
@@ -3439,11 +3469,18 @@
           <a:p>
             <a:pPr algn="r"/>
             <a:r>
+              <a:rPr lang="ru-RU" dirty="0" smtClean="0">
+                <a:latin typeface="Times New Roman" panose="02020603050405020304" pitchFamily="18" charset="0"/>
+                <a:cs typeface="Times New Roman" panose="02020603050405020304" pitchFamily="18" charset="0"/>
+              </a:rPr>
+              <a:t>Выполнили студенты </a:t>
+            </a:r>
+            <a:r>
               <a:rPr lang="ru-RU" dirty="0">
                 <a:latin typeface="Times New Roman" panose="02020603050405020304" pitchFamily="18" charset="0"/>
                 <a:cs typeface="Times New Roman" panose="02020603050405020304" pitchFamily="18" charset="0"/>
               </a:rPr>
-              <a:t>Выполнил студент группы П-40</a:t>
+              <a:t>группы П-40</a:t>
             </a:r>
           </a:p>
           <a:p>
@@ -3453,8 +3490,29 @@
                 <a:latin typeface="Times New Roman" panose="02020603050405020304" pitchFamily="18" charset="0"/>
                 <a:cs typeface="Times New Roman" panose="02020603050405020304" pitchFamily="18" charset="0"/>
               </a:rPr>
-              <a:t>Бычков Д. В.</a:t>
-            </a:r>
+              <a:t>Бычков Д. В</a:t>
+            </a:r>
+            <a:r>
+              <a:rPr lang="ru-RU" dirty="0" smtClean="0">
+                <a:latin typeface="Times New Roman" panose="02020603050405020304" pitchFamily="18" charset="0"/>
+                <a:cs typeface="Times New Roman" panose="02020603050405020304" pitchFamily="18" charset="0"/>
+              </a:rPr>
+              <a:t>.</a:t>
+            </a:r>
+          </a:p>
+          <a:p>
+            <a:pPr algn="r"/>
+            <a:r>
+              <a:rPr lang="ru-RU" dirty="0" smtClean="0">
+                <a:latin typeface="Times New Roman" panose="02020603050405020304" pitchFamily="18" charset="0"/>
+                <a:cs typeface="Times New Roman" panose="02020603050405020304" pitchFamily="18" charset="0"/>
+              </a:rPr>
+              <a:t>Денисюк Я. Н.</a:t>
+            </a:r>
+            <a:endParaRPr lang="ru-RU" dirty="0">
+              <a:latin typeface="Times New Roman" panose="02020603050405020304" pitchFamily="18" charset="0"/>
+              <a:cs typeface="Times New Roman" panose="02020603050405020304" pitchFamily="18" charset="0"/>
+            </a:endParaRPr>
           </a:p>
         </p:txBody>
       </p:sp>
@@ -3468,6 +3526,13 @@
   <p:clrMapOvr>
     <a:masterClrMapping/>
   </p:clrMapOvr>
+  <p:timing>
+    <p:tnLst>
+      <p:par>
+        <p:cTn id="1" dur="indefinite" restart="never" nodeType="tmRoot"/>
+      </p:par>
+    </p:tnLst>
+  </p:timing>
 </p:sld>
 </file>
 
@@ -3488,6 +3553,36 @@
           <a:chExt cx="0" cy="0"/>
         </a:xfrm>
       </p:grpSpPr>
+      <p:pic>
+        <p:nvPicPr>
+          <p:cNvPr id="3" name="Рисунок 2"/>
+          <p:cNvPicPr>
+            <a:picLocks noChangeAspect="1"/>
+          </p:cNvPicPr>
+          <p:nvPr/>
+        </p:nvPicPr>
+        <p:blipFill>
+          <a:blip r:embed="rId2">
+            <a:extLst>
+              <a:ext uri="{28A0092B-C50C-407E-A947-70E740481C1C}">
+                <a14:useLocalDpi xmlns:a14="http://schemas.microsoft.com/office/drawing/2010/main" val="0"/>
+              </a:ext>
+            </a:extLst>
+          </a:blip>
+          <a:stretch>
+            <a:fillRect/>
+          </a:stretch>
+        </p:blipFill>
+        <p:spPr>
+          <a:xfrm>
+            <a:off x="0" y="0"/>
+            <a:ext cx="12192000" cy="6858000"/>
+          </a:xfrm>
+          <a:prstGeom prst="rect">
+            <a:avLst/>
+          </a:prstGeom>
+        </p:spPr>
+      </p:pic>
       <p:sp>
         <p:nvSpPr>
           <p:cNvPr id="2" name="Объект 2">
@@ -3707,6 +3802,13 @@
   <p:clrMapOvr>
     <a:masterClrMapping/>
   </p:clrMapOvr>
+  <p:timing>
+    <p:tnLst>
+      <p:par>
+        <p:cTn id="1" dur="indefinite" restart="never" nodeType="tmRoot"/>
+      </p:par>
+    </p:tnLst>
+  </p:timing>
 </p:sld>
 </file>
 
@@ -3727,6 +3829,36 @@
           <a:chExt cx="0" cy="0"/>
         </a:xfrm>
       </p:grpSpPr>
+      <p:pic>
+        <p:nvPicPr>
+          <p:cNvPr id="4" name="Рисунок 3"/>
+          <p:cNvPicPr>
+            <a:picLocks noChangeAspect="1"/>
+          </p:cNvPicPr>
+          <p:nvPr/>
+        </p:nvPicPr>
+        <p:blipFill>
+          <a:blip r:embed="rId2">
+            <a:extLst>
+              <a:ext uri="{28A0092B-C50C-407E-A947-70E740481C1C}">
+                <a14:useLocalDpi xmlns:a14="http://schemas.microsoft.com/office/drawing/2010/main" val="0"/>
+              </a:ext>
+            </a:extLst>
+          </a:blip>
+          <a:stretch>
+            <a:fillRect/>
+          </a:stretch>
+        </p:blipFill>
+        <p:spPr>
+          <a:xfrm>
+            <a:off x="0" y="0"/>
+            <a:ext cx="12192000" cy="6858000"/>
+          </a:xfrm>
+          <a:prstGeom prst="rect">
+            <a:avLst/>
+          </a:prstGeom>
+        </p:spPr>
+      </p:pic>
       <p:sp>
         <p:nvSpPr>
           <p:cNvPr id="3" name="Объект 2">
@@ -3781,6 +3913,13 @@
   <p:clrMapOvr>
     <a:masterClrMapping/>
   </p:clrMapOvr>
+  <p:timing>
+    <p:tnLst>
+      <p:par>
+        <p:cTn id="1" dur="indefinite" restart="never" nodeType="tmRoot"/>
+      </p:par>
+    </p:tnLst>
+  </p:timing>
 </p:sld>
 </file>
 
@@ -3801,6 +3940,36 @@
           <a:chExt cx="0" cy="0"/>
         </a:xfrm>
       </p:grpSpPr>
+      <p:pic>
+        <p:nvPicPr>
+          <p:cNvPr id="6" name="Рисунок 5"/>
+          <p:cNvPicPr>
+            <a:picLocks noChangeAspect="1"/>
+          </p:cNvPicPr>
+          <p:nvPr/>
+        </p:nvPicPr>
+        <p:blipFill>
+          <a:blip r:embed="rId2">
+            <a:extLst>
+              <a:ext uri="{28A0092B-C50C-407E-A947-70E740481C1C}">
+                <a14:useLocalDpi xmlns:a14="http://schemas.microsoft.com/office/drawing/2010/main" val="0"/>
+              </a:ext>
+            </a:extLst>
+          </a:blip>
+          <a:stretch>
+            <a:fillRect/>
+          </a:stretch>
+        </p:blipFill>
+        <p:spPr>
+          <a:xfrm>
+            <a:off x="0" y="0"/>
+            <a:ext cx="12192000" cy="6858000"/>
+          </a:xfrm>
+          <a:prstGeom prst="rect">
+            <a:avLst/>
+          </a:prstGeom>
+        </p:spPr>
+      </p:pic>
       <p:sp>
         <p:nvSpPr>
           <p:cNvPr id="5" name="Объект 2">
@@ -4179,6 +4348,13 @@
   <p:clrMapOvr>
     <a:masterClrMapping/>
   </p:clrMapOvr>
+  <p:timing>
+    <p:tnLst>
+      <p:par>
+        <p:cTn id="1" dur="indefinite" restart="never" nodeType="tmRoot"/>
+      </p:par>
+    </p:tnLst>
+  </p:timing>
 </p:sld>
 </file>
 
@@ -4199,6 +4375,36 @@
           <a:chExt cx="0" cy="0"/>
         </a:xfrm>
       </p:grpSpPr>
+      <p:pic>
+        <p:nvPicPr>
+          <p:cNvPr id="6" name="Рисунок 5"/>
+          <p:cNvPicPr>
+            <a:picLocks noChangeAspect="1"/>
+          </p:cNvPicPr>
+          <p:nvPr/>
+        </p:nvPicPr>
+        <p:blipFill>
+          <a:blip r:embed="rId2">
+            <a:extLst>
+              <a:ext uri="{28A0092B-C50C-407E-A947-70E740481C1C}">
+                <a14:useLocalDpi xmlns:a14="http://schemas.microsoft.com/office/drawing/2010/main" val="0"/>
+              </a:ext>
+            </a:extLst>
+          </a:blip>
+          <a:stretch>
+            <a:fillRect/>
+          </a:stretch>
+        </p:blipFill>
+        <p:spPr>
+          <a:xfrm>
+            <a:off x="0" y="0"/>
+            <a:ext cx="12192000" cy="6858000"/>
+          </a:xfrm>
+          <a:prstGeom prst="rect">
+            <a:avLst/>
+          </a:prstGeom>
+        </p:spPr>
+      </p:pic>
       <p:sp>
         <p:nvSpPr>
           <p:cNvPr id="4" name="Объект 2">
@@ -4626,6 +4832,13 @@
   <p:clrMapOvr>
     <a:masterClrMapping/>
   </p:clrMapOvr>
+  <p:timing>
+    <p:tnLst>
+      <p:par>
+        <p:cTn id="1" dur="indefinite" restart="never" nodeType="tmRoot"/>
+      </p:par>
+    </p:tnLst>
+  </p:timing>
 </p:sld>
 </file>
 
@@ -4646,6 +4859,36 @@
           <a:chExt cx="0" cy="0"/>
         </a:xfrm>
       </p:grpSpPr>
+      <p:pic>
+        <p:nvPicPr>
+          <p:cNvPr id="6" name="Рисунок 5"/>
+          <p:cNvPicPr>
+            <a:picLocks noChangeAspect="1"/>
+          </p:cNvPicPr>
+          <p:nvPr/>
+        </p:nvPicPr>
+        <p:blipFill>
+          <a:blip r:embed="rId2">
+            <a:extLst>
+              <a:ext uri="{28A0092B-C50C-407E-A947-70E740481C1C}">
+                <a14:useLocalDpi xmlns:a14="http://schemas.microsoft.com/office/drawing/2010/main" val="0"/>
+              </a:ext>
+            </a:extLst>
+          </a:blip>
+          <a:stretch>
+            <a:fillRect/>
+          </a:stretch>
+        </p:blipFill>
+        <p:spPr>
+          <a:xfrm>
+            <a:off x="0" y="0"/>
+            <a:ext cx="12192000" cy="6858000"/>
+          </a:xfrm>
+          <a:prstGeom prst="rect">
+            <a:avLst/>
+          </a:prstGeom>
+        </p:spPr>
+      </p:pic>
       <p:sp>
         <p:nvSpPr>
           <p:cNvPr id="4" name="Объект 2">
@@ -5165,6 +5408,13 @@
   <p:clrMapOvr>
     <a:masterClrMapping/>
   </p:clrMapOvr>
+  <p:timing>
+    <p:tnLst>
+      <p:par>
+        <p:cTn id="1" dur="indefinite" restart="never" nodeType="tmRoot"/>
+      </p:par>
+    </p:tnLst>
+  </p:timing>
 </p:sld>
 </file>
 
@@ -5185,6 +5435,36 @@
           <a:chExt cx="0" cy="0"/>
         </a:xfrm>
       </p:grpSpPr>
+      <p:pic>
+        <p:nvPicPr>
+          <p:cNvPr id="4" name="Рисунок 3"/>
+          <p:cNvPicPr>
+            <a:picLocks noChangeAspect="1"/>
+          </p:cNvPicPr>
+          <p:nvPr/>
+        </p:nvPicPr>
+        <p:blipFill>
+          <a:blip r:embed="rId2">
+            <a:extLst>
+              <a:ext uri="{28A0092B-C50C-407E-A947-70E740481C1C}">
+                <a14:useLocalDpi xmlns:a14="http://schemas.microsoft.com/office/drawing/2010/main" val="0"/>
+              </a:ext>
+            </a:extLst>
+          </a:blip>
+          <a:stretch>
+            <a:fillRect/>
+          </a:stretch>
+        </p:blipFill>
+        <p:spPr>
+          <a:xfrm>
+            <a:off x="0" y="0"/>
+            <a:ext cx="12192000" cy="6858000"/>
+          </a:xfrm>
+          <a:prstGeom prst="rect">
+            <a:avLst/>
+          </a:prstGeom>
+        </p:spPr>
+      </p:pic>
       <p:sp>
         <p:nvSpPr>
           <p:cNvPr id="2" name="Объект 2">
@@ -5664,6 +5944,13 @@
   <p:clrMapOvr>
     <a:masterClrMapping/>
   </p:clrMapOvr>
+  <p:timing>
+    <p:tnLst>
+      <p:par>
+        <p:cTn id="1" dur="indefinite" restart="never" nodeType="tmRoot"/>
+      </p:par>
+    </p:tnLst>
+  </p:timing>
 </p:sld>
 </file>
 
@@ -5684,6 +5971,36 @@
           <a:chExt cx="0" cy="0"/>
         </a:xfrm>
       </p:grpSpPr>
+      <p:pic>
+        <p:nvPicPr>
+          <p:cNvPr id="6" name="Рисунок 5"/>
+          <p:cNvPicPr>
+            <a:picLocks noChangeAspect="1"/>
+          </p:cNvPicPr>
+          <p:nvPr/>
+        </p:nvPicPr>
+        <p:blipFill>
+          <a:blip r:embed="rId2">
+            <a:extLst>
+              <a:ext uri="{28A0092B-C50C-407E-A947-70E740481C1C}">
+                <a14:useLocalDpi xmlns:a14="http://schemas.microsoft.com/office/drawing/2010/main" val="0"/>
+              </a:ext>
+            </a:extLst>
+          </a:blip>
+          <a:stretch>
+            <a:fillRect/>
+          </a:stretch>
+        </p:blipFill>
+        <p:spPr>
+          <a:xfrm>
+            <a:off x="0" y="0"/>
+            <a:ext cx="12192000" cy="6858000"/>
+          </a:xfrm>
+          <a:prstGeom prst="rect">
+            <a:avLst/>
+          </a:prstGeom>
+        </p:spPr>
+      </p:pic>
       <p:sp>
         <p:nvSpPr>
           <p:cNvPr id="2" name="Объект 2">
@@ -6675,6 +6992,13 @@
   <p:clrMapOvr>
     <a:masterClrMapping/>
   </p:clrMapOvr>
+  <p:timing>
+    <p:tnLst>
+      <p:par>
+        <p:cTn id="1" dur="indefinite" restart="never" nodeType="tmRoot"/>
+      </p:par>
+    </p:tnLst>
+  </p:timing>
 </p:sld>
 </file>
 
@@ -6695,6 +7019,36 @@
           <a:chExt cx="0" cy="0"/>
         </a:xfrm>
       </p:grpSpPr>
+      <p:pic>
+        <p:nvPicPr>
+          <p:cNvPr id="5" name="Рисунок 4"/>
+          <p:cNvPicPr>
+            <a:picLocks noChangeAspect="1"/>
+          </p:cNvPicPr>
+          <p:nvPr/>
+        </p:nvPicPr>
+        <p:blipFill>
+          <a:blip r:embed="rId2">
+            <a:extLst>
+              <a:ext uri="{28A0092B-C50C-407E-A947-70E740481C1C}">
+                <a14:useLocalDpi xmlns:a14="http://schemas.microsoft.com/office/drawing/2010/main" val="0"/>
+              </a:ext>
+            </a:extLst>
+          </a:blip>
+          <a:stretch>
+            <a:fillRect/>
+          </a:stretch>
+        </p:blipFill>
+        <p:spPr>
+          <a:xfrm>
+            <a:off x="0" y="0"/>
+            <a:ext cx="12192000" cy="6858000"/>
+          </a:xfrm>
+          <a:prstGeom prst="rect">
+            <a:avLst/>
+          </a:prstGeom>
+        </p:spPr>
+      </p:pic>
       <p:sp>
         <p:nvSpPr>
           <p:cNvPr id="2" name="Объект 2">
@@ -7136,6 +7490,13 @@
   <p:clrMapOvr>
     <a:masterClrMapping/>
   </p:clrMapOvr>
+  <p:timing>
+    <p:tnLst>
+      <p:par>
+        <p:cTn id="1" dur="indefinite" restart="never" nodeType="tmRoot"/>
+      </p:par>
+    </p:tnLst>
+  </p:timing>
 </p:sld>
 </file>
 
@@ -7156,6 +7517,36 @@
           <a:chExt cx="0" cy="0"/>
         </a:xfrm>
       </p:grpSpPr>
+      <p:pic>
+        <p:nvPicPr>
+          <p:cNvPr id="4" name="Рисунок 3"/>
+          <p:cNvPicPr>
+            <a:picLocks noChangeAspect="1"/>
+          </p:cNvPicPr>
+          <p:nvPr/>
+        </p:nvPicPr>
+        <p:blipFill>
+          <a:blip r:embed="rId2">
+            <a:extLst>
+              <a:ext uri="{28A0092B-C50C-407E-A947-70E740481C1C}">
+                <a14:useLocalDpi xmlns:a14="http://schemas.microsoft.com/office/drawing/2010/main" val="0"/>
+              </a:ext>
+            </a:extLst>
+          </a:blip>
+          <a:stretch>
+            <a:fillRect/>
+          </a:stretch>
+        </p:blipFill>
+        <p:spPr>
+          <a:xfrm>
+            <a:off x="0" y="0"/>
+            <a:ext cx="12192000" cy="6858000"/>
+          </a:xfrm>
+          <a:prstGeom prst="rect">
+            <a:avLst/>
+          </a:prstGeom>
+        </p:spPr>
+      </p:pic>
       <p:sp>
         <p:nvSpPr>
           <p:cNvPr id="2" name="Объект 2">
@@ -7655,6 +8046,13 @@
   <p:clrMapOvr>
     <a:masterClrMapping/>
   </p:clrMapOvr>
+  <p:timing>
+    <p:tnLst>
+      <p:par>
+        <p:cTn id="1" dur="indefinite" restart="never" nodeType="tmRoot"/>
+      </p:par>
+    </p:tnLst>
+  </p:timing>
 </p:sld>
 </file>
 

--- a/УП01 презентация.pptx
+++ b/УП01 презентация.pptx
@@ -3394,11 +3394,58 @@
           <a:lstStyle/>
           <a:p>
             <a:r>
+              <a:rPr lang="ru-RU" sz="3600" dirty="0" smtClean="0">
+                <a:latin typeface="Times New Roman" panose="02020603050405020304" pitchFamily="18" charset="0"/>
+                <a:cs typeface="Times New Roman" panose="02020603050405020304" pitchFamily="18" charset="0"/>
+              </a:rPr>
+              <a:t>ФГБОУ Колледж </a:t>
+            </a:r>
+            <a:r>
+              <a:rPr lang="ru-RU" sz="3600" dirty="0" err="1" smtClean="0">
+                <a:latin typeface="Times New Roman" panose="02020603050405020304" pitchFamily="18" charset="0"/>
+                <a:cs typeface="Times New Roman" panose="02020603050405020304" pitchFamily="18" charset="0"/>
+              </a:rPr>
+              <a:t>Росрезерва</a:t>
+            </a:r>
+            <a:r>
+              <a:rPr lang="ru-RU" sz="3600" dirty="0" smtClean="0">
+                <a:latin typeface="Times New Roman" panose="02020603050405020304" pitchFamily="18" charset="0"/>
+                <a:cs typeface="Times New Roman" panose="02020603050405020304" pitchFamily="18" charset="0"/>
+              </a:rPr>
+              <a:t/>
+            </a:r>
+            <a:br>
+              <a:rPr lang="ru-RU" sz="3600" dirty="0" smtClean="0">
+                <a:latin typeface="Times New Roman" panose="02020603050405020304" pitchFamily="18" charset="0"/>
+                <a:cs typeface="Times New Roman" panose="02020603050405020304" pitchFamily="18" charset="0"/>
+              </a:rPr>
+            </a:br>
+            <a:r>
+              <a:rPr lang="ru-RU" sz="3600" dirty="0" smtClean="0">
+                <a:latin typeface="Times New Roman" panose="02020603050405020304" pitchFamily="18" charset="0"/>
+                <a:cs typeface="Times New Roman" panose="02020603050405020304" pitchFamily="18" charset="0"/>
+              </a:rPr>
+              <a:t/>
+            </a:r>
+            <a:br>
+              <a:rPr lang="ru-RU" sz="3600" dirty="0" smtClean="0">
+                <a:latin typeface="Times New Roman" panose="02020603050405020304" pitchFamily="18" charset="0"/>
+                <a:cs typeface="Times New Roman" panose="02020603050405020304" pitchFamily="18" charset="0"/>
+              </a:rPr>
+            </a:br>
+            <a:r>
+              <a:rPr lang="ru-RU" sz="3600" dirty="0" smtClean="0">
+                <a:latin typeface="Times New Roman" panose="02020603050405020304" pitchFamily="18" charset="0"/>
+                <a:cs typeface="Times New Roman" panose="02020603050405020304" pitchFamily="18" charset="0"/>
+              </a:rPr>
+              <a:t>УП </a:t>
+            </a:r>
+            <a:r>
               <a:rPr lang="ru-RU" sz="3600" dirty="0">
                 <a:latin typeface="Times New Roman" panose="02020603050405020304" pitchFamily="18" charset="0"/>
                 <a:cs typeface="Times New Roman" panose="02020603050405020304" pitchFamily="18" charset="0"/>
               </a:rPr>
-              <a:t>УП 01. РАЗРАБОТКА ПРОГРАММНЫХ МОДУЛЕЙ</a:t>
+              <a:t>01. РАЗРАБОТКА ПРОГРАММНЫХ МОДУЛЕЙ</a:t>
             </a:r>
           </a:p>
         </p:txBody>
